--- a/参赛材料/楠溪智游-路演稿.pptx
+++ b/参赛材料/楠溪智游-路演稿.pptx
@@ -660,7 +660,7 @@
           </a:p>
           <a:p xmlns:a="http://schemas.openxmlformats.org/drawingml/2006/main">
             <a:r>
-              <a:t>项目在线版：https://nanxi-smart-travel.netlify.app</a:t>
+              <a:t>项目在线版：https://naxi-travel-ai.netlify.app</a:t>
             </a:r>
           </a:p>
           <a:p xmlns:a="http://schemas.openxmlformats.org/drawingml/2006/main">
@@ -755,7 +755,7 @@
           </a:p>
           <a:p xmlns:a="http://schemas.openxmlformats.org/drawingml/2006/main">
             <a:r>
-              <a:t>项目在线版：https://nanxi-smart-travel.netlify.app</a:t>
+              <a:t>项目在线版：https://naxi-travel-ai.netlify.app</a:t>
             </a:r>
           </a:p>
           <a:p xmlns:a="http://schemas.openxmlformats.org/drawingml/2006/main">
@@ -1045,7 +1045,7 @@
           </a:p>
           <a:p xmlns:a="http://schemas.openxmlformats.org/drawingml/2006/main">
             <a:r>
-              <a:t>在线体验：https://nanxi-smart-travel.netlify.app</a:t>
+              <a:t>在线体验：https://naxi-travel-ai.netlify.app</a:t>
             </a:r>
           </a:p>
           <a:p xmlns:a="http://schemas.openxmlformats.org/drawingml/2006/main">
@@ -1230,7 +1230,7 @@
           </a:p>
           <a:p xmlns:a="http://schemas.openxmlformats.org/drawingml/2006/main">
             <a:r>
-              <a:t>在线作品：https://nanxi-smart-travel.netlify.app</a:t>
+              <a:t>在线作品：https://naxi-travel-ai.netlify.app</a:t>
             </a:r>
           </a:p>
           <a:p xmlns:a="http://schemas.openxmlformats.org/drawingml/2006/main">
@@ -7873,7 +7873,7 @@
                 <a:ea typeface="Microsoft YaHei"/>
                 <a:cs typeface="Microsoft YaHei"/>
               </a:rPr>
-              <a:t>nanxi-smart-travel.netlify.app</a:t>
+              <a:t>naxi-travel-ai.netlify.app</a:t>
             </a:r>
           </a:p>
         </p:txBody>
